--- a/chineseliceum_presentation.pptx
+++ b/chineseliceum_presentation.pptx
@@ -126,305 +126,12 @@
 </p:presentation>
 </file>
 
-<file path=ppt/changesInfos/changesInfo1.xml><?xml version="1.0" encoding="utf-8"?>
-<pc:chgInfo xmlns:a="http://schemas.openxmlformats.org/drawingml/2006/main" xmlns:r="http://schemas.openxmlformats.org/officeDocument/2006/relationships" xmlns:ac="http://schemas.microsoft.com/office/drawing/2013/main/command" xmlns:pc="http://schemas.microsoft.com/office/powerpoint/2013/main/command">
-  <pc:docChgLst>
-    <pc:chgData name="Максим Савельев" userId="15bbd97c3feb820d" providerId="LiveId" clId="{2E56E7A8-F23E-40E7-8F16-FC52779875E5}"/>
-    <pc:docChg chg="undo custSel delSld modSld">
-      <pc:chgData name="Максим Савельев" userId="15bbd97c3feb820d" providerId="LiveId" clId="{2E56E7A8-F23E-40E7-8F16-FC52779875E5}" dt="2026-03-26T13:47:06.296" v="447" actId="1076"/>
-      <pc:docMkLst>
-        <pc:docMk/>
-      </pc:docMkLst>
-      <pc:sldChg chg="modSp mod">
-        <pc:chgData name="Максим Савельев" userId="15bbd97c3feb820d" providerId="LiveId" clId="{2E56E7A8-F23E-40E7-8F16-FC52779875E5}" dt="2026-03-26T12:12:27.081" v="271" actId="1076"/>
-        <pc:sldMkLst>
-          <pc:docMk/>
-          <pc:sldMk cId="664291235" sldId="256"/>
-        </pc:sldMkLst>
-        <pc:spChg chg="mod">
-          <ac:chgData name="Максим Савельев" userId="15bbd97c3feb820d" providerId="LiveId" clId="{2E56E7A8-F23E-40E7-8F16-FC52779875E5}" dt="2026-03-26T12:12:19.296" v="270" actId="1076"/>
-          <ac:spMkLst>
-            <pc:docMk/>
-            <pc:sldMk cId="664291235" sldId="256"/>
-            <ac:spMk id="3" creationId="{00000000-0000-0000-0000-000000000000}"/>
-          </ac:spMkLst>
-        </pc:spChg>
-        <pc:spChg chg="mod">
-          <ac:chgData name="Максим Савельев" userId="15bbd97c3feb820d" providerId="LiveId" clId="{2E56E7A8-F23E-40E7-8F16-FC52779875E5}" dt="2026-03-26T12:12:27.081" v="271" actId="1076"/>
-          <ac:spMkLst>
-            <pc:docMk/>
-            <pc:sldMk cId="664291235" sldId="256"/>
-            <ac:spMk id="6" creationId="{00000000-0000-0000-0000-000000000000}"/>
-          </ac:spMkLst>
-        </pc:spChg>
-        <pc:picChg chg="mod">
-          <ac:chgData name="Максим Савельев" userId="15bbd97c3feb820d" providerId="LiveId" clId="{2E56E7A8-F23E-40E7-8F16-FC52779875E5}" dt="2026-03-26T11:47:37.109" v="130" actId="1076"/>
-          <ac:picMkLst>
-            <pc:docMk/>
-            <pc:sldMk cId="664291235" sldId="256"/>
-            <ac:picMk id="1026" creationId="{00000000-0000-0000-0000-000000000000}"/>
-          </ac:picMkLst>
-        </pc:picChg>
-      </pc:sldChg>
-      <pc:sldChg chg="addSp delSp modSp mod">
-        <pc:chgData name="Максим Савельев" userId="15bbd97c3feb820d" providerId="LiveId" clId="{2E56E7A8-F23E-40E7-8F16-FC52779875E5}" dt="2026-03-26T13:36:39.879" v="343" actId="1076"/>
-        <pc:sldMkLst>
-          <pc:docMk/>
-          <pc:sldMk cId="1335103015" sldId="258"/>
-        </pc:sldMkLst>
-        <pc:spChg chg="mod">
-          <ac:chgData name="Максим Савельев" userId="15bbd97c3feb820d" providerId="LiveId" clId="{2E56E7A8-F23E-40E7-8F16-FC52779875E5}" dt="2026-03-26T13:36:31.563" v="340" actId="1076"/>
-          <ac:spMkLst>
-            <pc:docMk/>
-            <pc:sldMk cId="1335103015" sldId="258"/>
-            <ac:spMk id="2" creationId="{00000000-0000-0000-0000-000000000000}"/>
-          </ac:spMkLst>
-        </pc:spChg>
-        <pc:picChg chg="add del">
-          <ac:chgData name="Максим Савельев" userId="15bbd97c3feb820d" providerId="LiveId" clId="{2E56E7A8-F23E-40E7-8F16-FC52779875E5}" dt="2026-03-26T11:56:34.081" v="259" actId="22"/>
-          <ac:picMkLst>
-            <pc:docMk/>
-            <pc:sldMk cId="1335103015" sldId="258"/>
-            <ac:picMk id="3" creationId="{161EEB63-3768-4B55-0ACE-52A835D209AB}"/>
-          </ac:picMkLst>
-        </pc:picChg>
-        <pc:picChg chg="del">
-          <ac:chgData name="Максим Савельев" userId="15bbd97c3feb820d" providerId="LiveId" clId="{2E56E7A8-F23E-40E7-8F16-FC52779875E5}" dt="2026-03-26T11:56:32.558" v="256" actId="478"/>
-          <ac:picMkLst>
-            <pc:docMk/>
-            <pc:sldMk cId="1335103015" sldId="258"/>
-            <ac:picMk id="5" creationId="{00000000-0000-0000-0000-000000000000}"/>
-          </ac:picMkLst>
-        </pc:picChg>
-        <pc:picChg chg="add mod">
-          <ac:chgData name="Максим Савельев" userId="15bbd97c3feb820d" providerId="LiveId" clId="{2E56E7A8-F23E-40E7-8F16-FC52779875E5}" dt="2026-03-26T13:36:39.879" v="343" actId="1076"/>
-          <ac:picMkLst>
-            <pc:docMk/>
-            <pc:sldMk cId="1335103015" sldId="258"/>
-            <ac:picMk id="6" creationId="{CE1D516C-B83A-15D4-9310-0C884D7F8827}"/>
-          </ac:picMkLst>
-        </pc:picChg>
-      </pc:sldChg>
-      <pc:sldChg chg="addSp delSp modSp mod">
-        <pc:chgData name="Максим Савельев" userId="15bbd97c3feb820d" providerId="LiveId" clId="{2E56E7A8-F23E-40E7-8F16-FC52779875E5}" dt="2026-03-26T13:36:49.858" v="346" actId="1076"/>
-        <pc:sldMkLst>
-          <pc:docMk/>
-          <pc:sldMk cId="3127110517" sldId="259"/>
-        </pc:sldMkLst>
-        <pc:spChg chg="mod">
-          <ac:chgData name="Максим Савельев" userId="15bbd97c3feb820d" providerId="LiveId" clId="{2E56E7A8-F23E-40E7-8F16-FC52779875E5}" dt="2026-03-26T13:36:46.621" v="344" actId="1076"/>
-          <ac:spMkLst>
-            <pc:docMk/>
-            <pc:sldMk cId="3127110517" sldId="259"/>
-            <ac:spMk id="2" creationId="{00000000-0000-0000-0000-000000000000}"/>
-          </ac:spMkLst>
-        </pc:spChg>
-        <pc:spChg chg="add del">
-          <ac:chgData name="Максим Савельев" userId="15bbd97c3feb820d" providerId="LiveId" clId="{2E56E7A8-F23E-40E7-8F16-FC52779875E5}" dt="2026-03-26T12:14:18.267" v="279" actId="22"/>
-          <ac:spMkLst>
-            <pc:docMk/>
-            <pc:sldMk cId="3127110517" sldId="259"/>
-            <ac:spMk id="4" creationId="{F7123587-46C8-B7BE-11A8-2EF0C13C561B}"/>
-          </ac:spMkLst>
-        </pc:spChg>
-        <pc:picChg chg="add mod">
-          <ac:chgData name="Максим Савельев" userId="15bbd97c3feb820d" providerId="LiveId" clId="{2E56E7A8-F23E-40E7-8F16-FC52779875E5}" dt="2026-03-26T13:36:49.858" v="346" actId="1076"/>
-          <ac:picMkLst>
-            <pc:docMk/>
-            <pc:sldMk cId="3127110517" sldId="259"/>
-            <ac:picMk id="5" creationId="{B50AC49C-E417-8E0F-65D8-B94639A4F314}"/>
-          </ac:picMkLst>
-        </pc:picChg>
-        <pc:picChg chg="del mod">
-          <ac:chgData name="Максим Савельев" userId="15bbd97c3feb820d" providerId="LiveId" clId="{2E56E7A8-F23E-40E7-8F16-FC52779875E5}" dt="2026-03-26T12:14:17.042" v="277" actId="478"/>
-          <ac:picMkLst>
-            <pc:docMk/>
-            <pc:sldMk cId="3127110517" sldId="259"/>
-            <ac:picMk id="6" creationId="{00000000-0000-0000-0000-000000000000}"/>
-          </ac:picMkLst>
-        </pc:picChg>
-      </pc:sldChg>
-      <pc:sldChg chg="addSp delSp modSp mod">
-        <pc:chgData name="Максим Савельев" userId="15bbd97c3feb820d" providerId="LiveId" clId="{2E56E7A8-F23E-40E7-8F16-FC52779875E5}" dt="2026-03-26T13:41:58.748" v="383" actId="1076"/>
-        <pc:sldMkLst>
-          <pc:docMk/>
-          <pc:sldMk cId="3253609145" sldId="260"/>
-        </pc:sldMkLst>
-        <pc:spChg chg="add del mod">
-          <ac:chgData name="Максим Савельев" userId="15bbd97c3feb820d" providerId="LiveId" clId="{2E56E7A8-F23E-40E7-8F16-FC52779875E5}" dt="2026-03-26T13:37:16.854" v="374" actId="1076"/>
-          <ac:spMkLst>
-            <pc:docMk/>
-            <pc:sldMk cId="3253609145" sldId="260"/>
-            <ac:spMk id="2" creationId="{00000000-0000-0000-0000-000000000000}"/>
-          </ac:spMkLst>
-        </pc:spChg>
-        <pc:spChg chg="add del mod">
-          <ac:chgData name="Максим Савельев" userId="15bbd97c3feb820d" providerId="LiveId" clId="{2E56E7A8-F23E-40E7-8F16-FC52779875E5}" dt="2026-03-26T13:35:35.056" v="324" actId="478"/>
-          <ac:spMkLst>
-            <pc:docMk/>
-            <pc:sldMk cId="3253609145" sldId="260"/>
-            <ac:spMk id="4" creationId="{B415EF23-2991-E2BC-2DFC-7717EF6455DC}"/>
-          </ac:spMkLst>
-        </pc:spChg>
-        <pc:picChg chg="add del mod">
-          <ac:chgData name="Максим Савельев" userId="15bbd97c3feb820d" providerId="LiveId" clId="{2E56E7A8-F23E-40E7-8F16-FC52779875E5}" dt="2026-03-26T13:41:34.134" v="379" actId="478"/>
-          <ac:picMkLst>
-            <pc:docMk/>
-            <pc:sldMk cId="3253609145" sldId="260"/>
-            <ac:picMk id="5" creationId="{EAE407AC-836E-DEAC-6196-5C3E23545A0F}"/>
-          </ac:picMkLst>
-        </pc:picChg>
-        <pc:picChg chg="add mod">
-          <ac:chgData name="Максим Савельев" userId="15bbd97c3feb820d" providerId="LiveId" clId="{2E56E7A8-F23E-40E7-8F16-FC52779875E5}" dt="2026-03-26T13:41:58.748" v="383" actId="1076"/>
-          <ac:picMkLst>
-            <pc:docMk/>
-            <pc:sldMk cId="3253609145" sldId="260"/>
-            <ac:picMk id="6" creationId="{64947DA9-89C6-085A-C6E0-7E9C6DB84386}"/>
-          </ac:picMkLst>
-        </pc:picChg>
-        <pc:picChg chg="del">
-          <ac:chgData name="Максим Савельев" userId="15bbd97c3feb820d" providerId="LiveId" clId="{2E56E7A8-F23E-40E7-8F16-FC52779875E5}" dt="2026-03-26T13:41:28.306" v="375" actId="478"/>
-          <ac:picMkLst>
-            <pc:docMk/>
-            <pc:sldMk cId="3253609145" sldId="260"/>
-            <ac:picMk id="8" creationId="{960EA306-FC34-4704-9083-5E03F31D91C4}"/>
-          </ac:picMkLst>
-        </pc:picChg>
-      </pc:sldChg>
-      <pc:sldChg chg="addSp delSp modSp mod">
-        <pc:chgData name="Максим Савельев" userId="15bbd97c3feb820d" providerId="LiveId" clId="{2E56E7A8-F23E-40E7-8F16-FC52779875E5}" dt="2026-03-26T13:46:04.048" v="436" actId="1076"/>
-        <pc:sldMkLst>
-          <pc:docMk/>
-          <pc:sldMk cId="2227301329" sldId="261"/>
-        </pc:sldMkLst>
-        <pc:spChg chg="mod">
-          <ac:chgData name="Максим Савельев" userId="15bbd97c3feb820d" providerId="LiveId" clId="{2E56E7A8-F23E-40E7-8F16-FC52779875E5}" dt="2026-03-26T13:42:35.965" v="428" actId="1076"/>
-          <ac:spMkLst>
-            <pc:docMk/>
-            <pc:sldMk cId="2227301329" sldId="261"/>
-            <ac:spMk id="2" creationId="{00000000-0000-0000-0000-000000000000}"/>
-          </ac:spMkLst>
-        </pc:spChg>
-        <pc:picChg chg="add mod">
-          <ac:chgData name="Максим Савельев" userId="15bbd97c3feb820d" providerId="LiveId" clId="{2E56E7A8-F23E-40E7-8F16-FC52779875E5}" dt="2026-03-26T13:46:04.048" v="436" actId="1076"/>
-          <ac:picMkLst>
-            <pc:docMk/>
-            <pc:sldMk cId="2227301329" sldId="261"/>
-            <ac:picMk id="3" creationId="{74E31340-44D2-52C9-12A3-EFC0F6884088}"/>
-          </ac:picMkLst>
-        </pc:picChg>
-        <pc:picChg chg="del">
-          <ac:chgData name="Максим Савельев" userId="15bbd97c3feb820d" providerId="LiveId" clId="{2E56E7A8-F23E-40E7-8F16-FC52779875E5}" dt="2026-03-26T13:42:45.168" v="429" actId="478"/>
-          <ac:picMkLst>
-            <pc:docMk/>
-            <pc:sldMk cId="2227301329" sldId="261"/>
-            <ac:picMk id="5" creationId="{00000000-0000-0000-0000-000000000000}"/>
-          </ac:picMkLst>
-        </pc:picChg>
-      </pc:sldChg>
-      <pc:sldChg chg="del">
-        <pc:chgData name="Максим Савельев" userId="15bbd97c3feb820d" providerId="LiveId" clId="{2E56E7A8-F23E-40E7-8F16-FC52779875E5}" dt="2026-03-26T13:46:09.514" v="437" actId="47"/>
-        <pc:sldMkLst>
-          <pc:docMk/>
-          <pc:sldMk cId="3735835669" sldId="262"/>
-        </pc:sldMkLst>
-      </pc:sldChg>
-      <pc:sldChg chg="addSp delSp modSp mod">
-        <pc:chgData name="Максим Савельев" userId="15bbd97c3feb820d" providerId="LiveId" clId="{2E56E7A8-F23E-40E7-8F16-FC52779875E5}" dt="2026-03-26T13:36:24.473" v="339" actId="1076"/>
-        <pc:sldMkLst>
-          <pc:docMk/>
-          <pc:sldMk cId="1281040273" sldId="266"/>
-        </pc:sldMkLst>
-        <pc:spChg chg="mod">
-          <ac:chgData name="Максим Савельев" userId="15bbd97c3feb820d" providerId="LiveId" clId="{2E56E7A8-F23E-40E7-8F16-FC52779875E5}" dt="2026-03-26T13:36:24.473" v="339" actId="1076"/>
-          <ac:spMkLst>
-            <pc:docMk/>
-            <pc:sldMk cId="1281040273" sldId="266"/>
-            <ac:spMk id="2" creationId="{00000000-0000-0000-0000-000000000000}"/>
-          </ac:spMkLst>
-        </pc:spChg>
-        <pc:spChg chg="mod">
-          <ac:chgData name="Максим Савельев" userId="15bbd97c3feb820d" providerId="LiveId" clId="{2E56E7A8-F23E-40E7-8F16-FC52779875E5}" dt="2026-03-26T12:17:20.764" v="321" actId="1076"/>
-          <ac:spMkLst>
-            <pc:docMk/>
-            <pc:sldMk cId="1281040273" sldId="266"/>
-            <ac:spMk id="3" creationId="{00000000-0000-0000-0000-000000000000}"/>
-          </ac:spMkLst>
-        </pc:spChg>
-        <pc:picChg chg="add mod">
-          <ac:chgData name="Максим Савельев" userId="15bbd97c3feb820d" providerId="LiveId" clId="{2E56E7A8-F23E-40E7-8F16-FC52779875E5}" dt="2026-03-26T12:15:02.612" v="319" actId="1076"/>
-          <ac:picMkLst>
-            <pc:docMk/>
-            <pc:sldMk cId="1281040273" sldId="266"/>
-            <ac:picMk id="4" creationId="{7E30E833-A9C1-9B53-7958-40E61537A5CB}"/>
-          </ac:picMkLst>
-        </pc:picChg>
-        <pc:picChg chg="del mod">
-          <ac:chgData name="Максим Савельев" userId="15bbd97c3feb820d" providerId="LiveId" clId="{2E56E7A8-F23E-40E7-8F16-FC52779875E5}" dt="2026-03-26T11:55:43.450" v="224" actId="478"/>
-          <ac:picMkLst>
-            <pc:docMk/>
-            <pc:sldMk cId="1281040273" sldId="266"/>
-            <ac:picMk id="5" creationId="{00000000-0000-0000-0000-000000000000}"/>
-          </ac:picMkLst>
-        </pc:picChg>
-        <pc:picChg chg="mod">
-          <ac:chgData name="Максим Савельев" userId="15bbd97c3feb820d" providerId="LiveId" clId="{2E56E7A8-F23E-40E7-8F16-FC52779875E5}" dt="2026-03-26T13:36:21.451" v="338" actId="1076"/>
-          <ac:picMkLst>
-            <pc:docMk/>
-            <pc:sldMk cId="1281040273" sldId="266"/>
-            <ac:picMk id="1026" creationId="{00000000-0000-0000-0000-000000000000}"/>
-          </ac:picMkLst>
-        </pc:picChg>
-      </pc:sldChg>
-      <pc:sldChg chg="modSp mod">
-        <pc:chgData name="Максим Савельев" userId="15bbd97c3feb820d" providerId="LiveId" clId="{2E56E7A8-F23E-40E7-8F16-FC52779875E5}" dt="2026-03-26T11:28:01.764" v="100" actId="20577"/>
-        <pc:sldMkLst>
-          <pc:docMk/>
-          <pc:sldMk cId="1484375060" sldId="267"/>
-        </pc:sldMkLst>
-        <pc:spChg chg="mod">
-          <ac:chgData name="Максим Савельев" userId="15bbd97c3feb820d" providerId="LiveId" clId="{2E56E7A8-F23E-40E7-8F16-FC52779875E5}" dt="2026-03-26T11:27:51.949" v="73" actId="20577"/>
-          <ac:spMkLst>
-            <pc:docMk/>
-            <pc:sldMk cId="1484375060" sldId="267"/>
-            <ac:spMk id="6" creationId="{00000000-0000-0000-0000-000000000000}"/>
-          </ac:spMkLst>
-        </pc:spChg>
-        <pc:spChg chg="mod">
-          <ac:chgData name="Максим Савельев" userId="15bbd97c3feb820d" providerId="LiveId" clId="{2E56E7A8-F23E-40E7-8F16-FC52779875E5}" dt="2026-03-26T11:28:01.764" v="100" actId="20577"/>
-          <ac:spMkLst>
-            <pc:docMk/>
-            <pc:sldMk cId="1484375060" sldId="267"/>
-            <ac:spMk id="7" creationId="{00000000-0000-0000-0000-000000000000}"/>
-          </ac:spMkLst>
-        </pc:spChg>
-      </pc:sldChg>
-      <pc:sldChg chg="addSp delSp modSp mod delAnim modAnim">
-        <pc:chgData name="Максим Савельев" userId="15bbd97c3feb820d" providerId="LiveId" clId="{2E56E7A8-F23E-40E7-8F16-FC52779875E5}" dt="2026-03-26T13:47:06.296" v="447" actId="1076"/>
-        <pc:sldMkLst>
-          <pc:docMk/>
-          <pc:sldMk cId="569528145" sldId="268"/>
-        </pc:sldMkLst>
-        <pc:picChg chg="add mod">
-          <ac:chgData name="Максим Савельев" userId="15bbd97c3feb820d" providerId="LiveId" clId="{2E56E7A8-F23E-40E7-8F16-FC52779875E5}" dt="2026-03-26T13:47:06.296" v="447" actId="1076"/>
-          <ac:picMkLst>
-            <pc:docMk/>
-            <pc:sldMk cId="569528145" sldId="268"/>
-            <ac:picMk id="4" creationId="{0C4B38F6-06AC-649B-CDAA-C08D4C7E885D}"/>
-          </ac:picMkLst>
-        </pc:picChg>
-        <pc:picChg chg="del mod">
-          <ac:chgData name="Максим Савельев" userId="15bbd97c3feb820d" providerId="LiveId" clId="{2E56E7A8-F23E-40E7-8F16-FC52779875E5}" dt="2026-03-26T13:46:39.320" v="439" actId="478"/>
-          <ac:picMkLst>
-            <pc:docMk/>
-            <pc:sldMk cId="569528145" sldId="268"/>
-            <ac:picMk id="6" creationId="{CE5A2BFE-D3C9-482C-A253-E0426867D7D9}"/>
-          </ac:picMkLst>
-        </pc:picChg>
-      </pc:sldChg>
-    </pc:docChg>
-  </pc:docChgLst>
-</pc:chgInfo>
+<file path=ppt/revisionInfo.xml><?xml version="1.0" encoding="utf-8"?>
+<p1510:revInfo xmlns:a="http://schemas.openxmlformats.org/drawingml/2006/main" xmlns:r="http://schemas.openxmlformats.org/officeDocument/2006/relationships" xmlns:p1510="http://schemas.microsoft.com/office/powerpoint/2015/10/main">
+  <p1510:revLst>
+    <p1510:client id="{FD52ECDA-2449-4F84-A47D-F83CFB5C08BF}" v="97" dt="2026-05-14T09:17:06.277"/>
+  </p1510:revLst>
+</p1510:revInfo>
 </file>
 
 <file path=ppt/notesMasters/notesMaster1.xml><?xml version="1.0" encoding="utf-8"?>
@@ -3869,11 +3576,15 @@
           <a:lstStyle/>
           <a:p>
             <a:r>
-              <a:rPr lang="ru-RU" sz="9600" b="1" dirty="0" err="1"/>
+              <a:rPr lang="ru-RU" sz="8000">
+                <a:latin typeface="Arial Black"/>
+              </a:rPr>
               <a:t>Chinese</a:t>
             </a:r>
             <a:r>
-              <a:rPr lang="ru-RU" sz="9600" b="1" dirty="0"/>
+              <a:rPr lang="ru-RU" sz="8000" dirty="0">
+                <a:latin typeface="Arial Black"/>
+              </a:rPr>
               <a:t> Learning</a:t>
             </a:r>
           </a:p>
@@ -3891,33 +3602,33 @@
         </p:nvSpPr>
         <p:spPr>
           <a:xfrm>
-            <a:off x="452447" y="2990589"/>
+            <a:off x="579447" y="3176856"/>
             <a:ext cx="11488058" cy="876822"/>
           </a:xfrm>
         </p:spPr>
         <p:txBody>
-          <a:bodyPr>
+          <a:bodyPr vert="horz" lIns="91440" tIns="45720" rIns="91440" bIns="45720" rtlCol="0" anchor="t">
             <a:normAutofit/>
           </a:bodyPr>
           <a:lstStyle/>
           <a:p>
             <a:r>
               <a:rPr lang="ru-RU" sz="4000" dirty="0">
-                <a:latin typeface="Times New Roman" panose="02020603050405020304" pitchFamily="18" charset="0"/>
+                <a:latin typeface="Century Gothic"/>
                 <a:cs typeface="Times New Roman" panose="02020603050405020304" pitchFamily="18" charset="0"/>
               </a:rPr>
               <a:t>Китайский </a:t>
             </a:r>
             <a:r>
               <a:rPr lang="ru-RU" sz="4800" dirty="0">
-                <a:latin typeface="Times New Roman" panose="02020603050405020304" pitchFamily="18" charset="0"/>
+                <a:latin typeface="Century Gothic"/>
                 <a:cs typeface="Times New Roman" panose="02020603050405020304" pitchFamily="18" charset="0"/>
               </a:rPr>
               <a:t>язык</a:t>
             </a:r>
             <a:r>
               <a:rPr lang="ru-RU" sz="4000" dirty="0">
-                <a:latin typeface="Times New Roman" panose="02020603050405020304" pitchFamily="18" charset="0"/>
+                <a:latin typeface="Century Gothic"/>
                 <a:cs typeface="Times New Roman" panose="02020603050405020304" pitchFamily="18" charset="0"/>
               </a:rPr>
               <a:t> быстро и удобно</a:t>
@@ -3976,7 +3687,7 @@
           </a:prstGeom>
         </p:spPr>
         <p:txBody>
-          <a:bodyPr vert="horz" lIns="91440" tIns="45720" rIns="91440" bIns="45720" rtlCol="0">
+          <a:bodyPr vert="horz" lIns="91440" tIns="45720" rIns="91440" bIns="45720" rtlCol="0" anchor="t">
             <a:normAutofit fontScale="70000" lnSpcReduction="20000"/>
           </a:bodyPr>
           <a:lstStyle>
@@ -4146,7 +3857,7 @@
           <a:p>
             <a:r>
               <a:rPr lang="ru-RU" sz="4000" dirty="0">
-                <a:latin typeface="Times New Roman" panose="02020603050405020304" pitchFamily="18" charset="0"/>
+                <a:latin typeface="Century Gothic"/>
                 <a:cs typeface="Times New Roman" panose="02020603050405020304" pitchFamily="18" charset="0"/>
               </a:rPr>
               <a:t>Выполнили: Савельев Максим</a:t>
@@ -4155,21 +3866,21 @@
           <a:p>
             <a:r>
               <a:rPr lang="ru-RU" sz="4000" dirty="0">
-                <a:latin typeface="Times New Roman" panose="02020603050405020304" pitchFamily="18" charset="0"/>
+                <a:latin typeface="Century Gothic"/>
                 <a:cs typeface="Times New Roman" panose="02020603050405020304" pitchFamily="18" charset="0"/>
               </a:rPr>
               <a:t>                       </a:t>
             </a:r>
             <a:r>
-              <a:rPr lang="ru-RU" sz="4000" dirty="0" err="1">
-                <a:latin typeface="Times New Roman" panose="02020603050405020304" pitchFamily="18" charset="0"/>
+              <a:rPr lang="ru-RU" sz="4000">
+                <a:latin typeface="Century Gothic"/>
                 <a:cs typeface="Times New Roman" panose="02020603050405020304" pitchFamily="18" charset="0"/>
               </a:rPr>
               <a:t>Ташкараев</a:t>
             </a:r>
             <a:r>
               <a:rPr lang="ru-RU" sz="4000" dirty="0">
-                <a:latin typeface="Times New Roman" panose="02020603050405020304" pitchFamily="18" charset="0"/>
+                <a:latin typeface="Century Gothic"/>
                 <a:cs typeface="Times New Roman" panose="02020603050405020304" pitchFamily="18" charset="0"/>
               </a:rPr>
               <a:t> Руслан</a:t>
@@ -4301,23 +4012,23 @@
           <a:lstStyle/>
           <a:p>
             <a:r>
-              <a:rPr lang="ru-RU" sz="6600" dirty="0">
+              <a:rPr lang="ru-RU" sz="5400" dirty="0">
                 <a:solidFill>
                   <a:schemeClr val="accent5"/>
                 </a:solidFill>
-                <a:latin typeface="Times New Roman" panose="02020603050405020304" pitchFamily="18" charset="0"/>
-                <a:cs typeface="Times New Roman" panose="02020603050405020304" pitchFamily="18" charset="0"/>
+                <a:latin typeface="Arial Black"/>
+                <a:cs typeface="Times New Roman"/>
               </a:rPr>
               <a:t>Профиль пользователя</a:t>
             </a:r>
             <a:br>
-              <a:rPr lang="en-US" sz="3200" dirty="0">
-                <a:latin typeface="Times New Roman" panose="02020603050405020304" pitchFamily="18" charset="0"/>
+              <a:rPr lang="en-US" sz="5400" dirty="0">
+                <a:latin typeface="Arial Black"/>
                 <a:cs typeface="Times New Roman" panose="02020603050405020304" pitchFamily="18" charset="0"/>
               </a:rPr>
             </a:br>
-            <a:endParaRPr lang="ru-RU" sz="3200" dirty="0">
-              <a:latin typeface="Times New Roman" panose="02020603050405020304" pitchFamily="18" charset="0"/>
+            <a:endParaRPr lang="ru-RU" sz="5400">
+              <a:latin typeface="Arial Black"/>
               <a:cs typeface="Times New Roman" panose="02020603050405020304" pitchFamily="18" charset="0"/>
             </a:endParaRPr>
           </a:p>
@@ -4379,14 +4090,14 @@
           </a:xfrm>
         </p:spPr>
         <p:txBody>
-          <a:bodyPr>
+          <a:bodyPr vert="horz" lIns="91440" tIns="45720" rIns="91440" bIns="45720" rtlCol="0" anchor="t">
             <a:noAutofit/>
           </a:bodyPr>
           <a:lstStyle/>
           <a:p>
             <a:r>
               <a:rPr lang="ru-RU" sz="3600" dirty="0">
-                <a:latin typeface="Times New Roman" panose="02020603050405020304" pitchFamily="18" charset="0"/>
+                <a:latin typeface="Century Gothic"/>
                 <a:cs typeface="Times New Roman" panose="02020603050405020304" pitchFamily="18" charset="0"/>
               </a:rPr>
               <a:t>показывает место в рейтинге всех зарегистрированных пользователей сайта и очки рейтинга</a:t>
@@ -4394,7 +4105,7 @@
           </a:p>
           <a:p>
             <a:endParaRPr lang="ru-RU" sz="3600" dirty="0">
-              <a:latin typeface="Times New Roman" panose="02020603050405020304" pitchFamily="18" charset="0"/>
+              <a:latin typeface="Century Gothic"/>
               <a:cs typeface="Times New Roman" panose="02020603050405020304" pitchFamily="18" charset="0"/>
             </a:endParaRPr>
           </a:p>
@@ -4543,8 +4254,8 @@
         </p:nvSpPr>
         <p:spPr>
           <a:xfrm>
-            <a:off x="-631991" y="1250383"/>
-            <a:ext cx="11009088" cy="974818"/>
+            <a:off x="130009" y="1140316"/>
+            <a:ext cx="12135154" cy="974818"/>
           </a:xfrm>
         </p:spPr>
         <p:txBody>
@@ -4554,13 +4265,21 @@
           <a:lstStyle/>
           <a:p>
             <a:r>
-              <a:rPr lang="ru-RU" sz="9600" b="1" dirty="0" err="1"/>
-              <a:t>Chinese</a:t>
-            </a:r>
-            <a:r>
-              <a:rPr lang="ru-RU" sz="9600" b="1" dirty="0"/>
-              <a:t> Learning</a:t>
-            </a:r>
+              <a:rPr lang="ru-RU" sz="8000">
+                <a:solidFill>
+                  <a:schemeClr val="accent5"/>
+                </a:solidFill>
+                <a:latin typeface="Arial Black"/>
+              </a:rPr>
+              <a:t>Chinese Learning</a:t>
+            </a:r>
+            <a:endParaRPr lang="ru-RU" sz="8000">
+              <a:solidFill>
+                <a:schemeClr val="accent5"/>
+              </a:solidFill>
+              <a:ea typeface="Calibri Light"/>
+              <a:cs typeface="Calibri Light"/>
+            </a:endParaRPr>
           </a:p>
         </p:txBody>
       </p:sp>
@@ -4587,14 +4306,14 @@
           </a:xfrm>
         </p:spPr>
         <p:txBody>
-          <a:bodyPr>
+          <a:bodyPr vert="horz" lIns="91440" tIns="45720" rIns="91440" bIns="45720" rtlCol="0" anchor="t">
             <a:normAutofit/>
           </a:bodyPr>
           <a:lstStyle/>
           <a:p>
             <a:r>
               <a:rPr lang="ru-RU" sz="5400" dirty="0">
-                <a:latin typeface="Times New Roman" panose="02020603050405020304" pitchFamily="18" charset="0"/>
+                <a:latin typeface="Century Gothic"/>
                 <a:cs typeface="Times New Roman" panose="02020603050405020304" pitchFamily="18" charset="0"/>
               </a:rPr>
               <a:t>Итоги разработки</a:t>
@@ -4659,7 +4378,7 @@
           </a:prstGeom>
         </p:spPr>
         <p:txBody>
-          <a:bodyPr vert="horz" lIns="91440" tIns="45720" rIns="91440" bIns="45720" rtlCol="0">
+          <a:bodyPr vert="horz" lIns="91440" tIns="45720" rIns="91440" bIns="45720" rtlCol="0" anchor="t">
             <a:noAutofit/>
           </a:bodyPr>
           <a:lstStyle>
@@ -4832,23 +4551,23 @@
               <a:buChar char="•"/>
             </a:pPr>
             <a:r>
-              <a:rPr lang="ru-RU" sz="3200" dirty="0">
-                <a:latin typeface="Times New Roman" panose="02020603050405020304" pitchFamily="18" charset="0"/>
-                <a:cs typeface="Times New Roman" panose="02020603050405020304" pitchFamily="18" charset="0"/>
+              <a:rPr lang="ru-RU" sz="2800" dirty="0">
+                <a:latin typeface="Century Gothic"/>
+                <a:cs typeface="Times New Roman"/>
               </a:rPr>
               <a:t>Создано работающее веб-приложение на </a:t>
             </a:r>
             <a:r>
-              <a:rPr lang="ru-RU" sz="3200" dirty="0" err="1">
-                <a:latin typeface="Times New Roman" panose="02020603050405020304" pitchFamily="18" charset="0"/>
-                <a:cs typeface="Times New Roman" panose="02020603050405020304" pitchFamily="18" charset="0"/>
+              <a:rPr lang="ru-RU" sz="2800">
+                <a:latin typeface="Century Gothic"/>
+                <a:cs typeface="Times New Roman"/>
               </a:rPr>
               <a:t>Flask</a:t>
             </a:r>
             <a:r>
-              <a:rPr lang="ru-RU" sz="3200" dirty="0">
-                <a:latin typeface="Times New Roman" panose="02020603050405020304" pitchFamily="18" charset="0"/>
-                <a:cs typeface="Times New Roman" panose="02020603050405020304" pitchFamily="18" charset="0"/>
+              <a:rPr lang="ru-RU" sz="2800" dirty="0">
+                <a:latin typeface="Century Gothic"/>
+                <a:cs typeface="Times New Roman"/>
               </a:rPr>
               <a:t> с авторизацией.</a:t>
             </a:r>
@@ -4859,9 +4578,9 @@
               <a:buChar char="•"/>
             </a:pPr>
             <a:r>
-              <a:rPr lang="ru-RU" sz="3200" dirty="0">
-                <a:latin typeface="Times New Roman" panose="02020603050405020304" pitchFamily="18" charset="0"/>
-                <a:cs typeface="Times New Roman" panose="02020603050405020304" pitchFamily="18" charset="0"/>
+              <a:rPr lang="ru-RU" sz="2800" dirty="0">
+                <a:latin typeface="Century Gothic"/>
+                <a:cs typeface="Times New Roman"/>
               </a:rPr>
               <a:t>Реализованы: лексика, практика, история Китая и карточки.</a:t>
             </a:r>
@@ -4872,9 +4591,9 @@
               <a:buChar char="•"/>
             </a:pPr>
             <a:r>
-              <a:rPr lang="ru-RU" sz="3200" dirty="0">
-                <a:latin typeface="Times New Roman" panose="02020603050405020304" pitchFamily="18" charset="0"/>
-                <a:cs typeface="Times New Roman" panose="02020603050405020304" pitchFamily="18" charset="0"/>
+              <a:rPr lang="ru-RU" sz="2800" dirty="0">
+                <a:latin typeface="Century Gothic"/>
+                <a:cs typeface="Times New Roman"/>
               </a:rPr>
               <a:t>Имеется база данных с китайскими выражениями с словами.</a:t>
             </a:r>
@@ -4885,16 +4604,12 @@
               <a:buChar char="•"/>
             </a:pPr>
             <a:r>
-              <a:rPr lang="ru-RU" sz="3200" dirty="0">
-                <a:latin typeface="Times New Roman" panose="02020603050405020304" pitchFamily="18" charset="0"/>
-                <a:cs typeface="Times New Roman" panose="02020603050405020304" pitchFamily="18" charset="0"/>
+              <a:rPr lang="ru-RU" sz="2800" dirty="0">
+                <a:latin typeface="Century Gothic"/>
+                <a:cs typeface="Times New Roman"/>
               </a:rPr>
               <a:t>Есть отслеживание персонального прогресса пользователя.</a:t>
             </a:r>
-            <a:endParaRPr lang="ru-RU" sz="4400" dirty="0">
-              <a:latin typeface="Times New Roman" panose="02020603050405020304" pitchFamily="18" charset="0"/>
-              <a:cs typeface="Times New Roman" panose="02020603050405020304" pitchFamily="18" charset="0"/>
-            </a:endParaRPr>
           </a:p>
         </p:txBody>
       </p:sp>
@@ -4993,40 +4708,37 @@
         </p:nvSpPr>
         <p:spPr>
           <a:xfrm>
-            <a:off x="1561723" y="2192056"/>
-            <a:ext cx="9144000" cy="2580360"/>
-          </a:xfrm>
-        </p:spPr>
-        <p:txBody>
-          <a:bodyPr>
-            <a:normAutofit/>
+            <a:off x="-444877" y="1430056"/>
+            <a:ext cx="13089465" cy="3672560"/>
+          </a:xfrm>
+        </p:spPr>
+        <p:txBody>
+          <a:bodyPr vert="horz" lIns="91440" tIns="45720" rIns="91440" bIns="45720" rtlCol="0" anchor="b">
+            <a:noAutofit/>
           </a:bodyPr>
           <a:lstStyle/>
           <a:p>
             <a:r>
-              <a:rPr lang="ru-RU" sz="6600" dirty="0">
+              <a:rPr lang="ru-RU" sz="7200" dirty="0">
                 <a:solidFill>
                   <a:schemeClr val="accent5"/>
                 </a:solidFill>
-                <a:latin typeface="Times New Roman" panose="02020603050405020304" pitchFamily="18" charset="0"/>
-                <a:cs typeface="Times New Roman" panose="02020603050405020304" pitchFamily="18" charset="0"/>
+                <a:latin typeface="Arial Black"/>
+                <a:cs typeface="Times New Roman"/>
               </a:rPr>
               <a:t>Спасибо за внимание !</a:t>
             </a:r>
             <a:br>
-              <a:rPr lang="ru-RU" sz="6600" dirty="0">
-                <a:solidFill>
-                  <a:schemeClr val="accent5"/>
-                </a:solidFill>
-                <a:latin typeface="Times New Roman" panose="02020603050405020304" pitchFamily="18" charset="0"/>
+              <a:rPr lang="ru-RU" sz="7200" dirty="0">
+                <a:latin typeface="Arial Black"/>
                 <a:cs typeface="Times New Roman" panose="02020603050405020304" pitchFamily="18" charset="0"/>
               </a:rPr>
             </a:br>
-            <a:endParaRPr lang="ru-RU" sz="6600" dirty="0">
+            <a:endParaRPr lang="ru-RU" sz="7200" dirty="0">
               <a:solidFill>
                 <a:schemeClr val="accent5"/>
               </a:solidFill>
-              <a:latin typeface="Times New Roman" panose="02020603050405020304" pitchFamily="18" charset="0"/>
+              <a:latin typeface="Arial Black"/>
               <a:cs typeface="Times New Roman" panose="02020603050405020304" pitchFamily="18" charset="0"/>
             </a:endParaRPr>
           </a:p>
@@ -5154,12 +4866,12 @@
         </p:nvSpPr>
         <p:spPr>
           <a:xfrm>
-            <a:off x="411618" y="741687"/>
-            <a:ext cx="11368763" cy="5363077"/>
-          </a:xfrm>
-        </p:spPr>
-        <p:txBody>
-          <a:bodyPr>
+            <a:off x="411618" y="555420"/>
+            <a:ext cx="11368763" cy="5744077"/>
+          </a:xfrm>
+        </p:spPr>
+        <p:txBody>
+          <a:bodyPr vert="horz" lIns="91440" tIns="45720" rIns="91440" bIns="45720" rtlCol="0" anchor="t">
             <a:noAutofit/>
           </a:bodyPr>
           <a:lstStyle/>
@@ -5169,29 +4881,30 @@
                 <a:solidFill>
                   <a:schemeClr val="accent5"/>
                 </a:solidFill>
-                <a:latin typeface="Times New Roman" panose="02020603050405020304" pitchFamily="18" charset="0"/>
-                <a:cs typeface="Times New Roman" panose="02020603050405020304" pitchFamily="18" charset="0"/>
+                <a:latin typeface="Arial Black"/>
+                <a:cs typeface="Times New Roman"/>
               </a:rPr>
               <a:t>Цель  и задачи проекта </a:t>
             </a:r>
           </a:p>
           <a:p>
             <a:r>
-              <a:rPr lang="ru-RU" sz="3600" dirty="0">
-                <a:latin typeface="Times New Roman" panose="02020603050405020304" pitchFamily="18" charset="0"/>
-                <a:cs typeface="Times New Roman" panose="02020603050405020304" pitchFamily="18" charset="0"/>
+              <a:rPr lang="ru-RU" dirty="0">
+                <a:latin typeface="Century Gothic"/>
+                <a:cs typeface="Times New Roman"/>
               </a:rPr>
-              <a:t>разработать веб-приложение для самостоятельного изучения китайского языка, которое обеспечивает:</a:t>
-            </a:r>
-            <a:endParaRPr lang="en-US" sz="3600" dirty="0">
-              <a:latin typeface="Times New Roman" panose="02020603050405020304" pitchFamily="18" charset="0"/>
-              <a:cs typeface="Times New Roman" panose="02020603050405020304" pitchFamily="18" charset="0"/>
-            </a:endParaRPr>
-          </a:p>
-          <a:p>
-            <a:endParaRPr lang="ru-RU" dirty="0">
-              <a:latin typeface="Times New Roman" panose="02020603050405020304" pitchFamily="18" charset="0"/>
-              <a:cs typeface="Times New Roman" panose="02020603050405020304" pitchFamily="18" charset="0"/>
+              <a:t>разработать веб-приложение для самостоятельного изучения </a:t>
+            </a:r>
+            <a:r>
+              <a:rPr lang="ru-RU">
+                <a:latin typeface="Century Gothic"/>
+                <a:cs typeface="Times New Roman"/>
+              </a:rPr>
+              <a:t>китайского языка, которое обеспечивает</a:t>
+            </a:r>
+            <a:endParaRPr lang="en-US">
+              <a:latin typeface="Century Gothic"/>
+              <a:cs typeface="Times New Roman"/>
             </a:endParaRPr>
           </a:p>
           <a:p>
@@ -5201,8 +4914,8 @@
             </a:pPr>
             <a:r>
               <a:rPr lang="ru-RU" dirty="0">
-                <a:latin typeface="Times New Roman" panose="02020603050405020304" pitchFamily="18" charset="0"/>
-                <a:cs typeface="Times New Roman" panose="02020603050405020304" pitchFamily="18" charset="0"/>
+                <a:latin typeface="Century Gothic"/>
+                <a:cs typeface="Times New Roman"/>
               </a:rPr>
               <a:t>системное пополнение словарного запаса через интерактивные карточки и тематические уроки;</a:t>
             </a:r>
@@ -5214,8 +4927,8 @@
             </a:pPr>
             <a:r>
               <a:rPr lang="ru-RU" dirty="0">
-                <a:latin typeface="Times New Roman" panose="02020603050405020304" pitchFamily="18" charset="0"/>
-                <a:cs typeface="Times New Roman" panose="02020603050405020304" pitchFamily="18" charset="0"/>
+                <a:latin typeface="Century Gothic"/>
+                <a:cs typeface="Times New Roman"/>
               </a:rPr>
               <a:t>отработку навыков перевода слов и предложений с автоматической проверкой;</a:t>
             </a:r>
@@ -5227,8 +4940,8 @@
             </a:pPr>
             <a:r>
               <a:rPr lang="ru-RU" dirty="0">
-                <a:latin typeface="Times New Roman" panose="02020603050405020304" pitchFamily="18" charset="0"/>
-                <a:cs typeface="Times New Roman" panose="02020603050405020304" pitchFamily="18" charset="0"/>
+                <a:latin typeface="Century Gothic"/>
+                <a:cs typeface="Times New Roman"/>
               </a:rPr>
               <a:t>знакомство с историческими материалами Китая для повышения мотивации и культурного контекста;</a:t>
             </a:r>
@@ -5240,8 +4953,8 @@
             </a:pPr>
             <a:r>
               <a:rPr lang="ru-RU" dirty="0">
-                <a:latin typeface="Times New Roman" panose="02020603050405020304" pitchFamily="18" charset="0"/>
-                <a:cs typeface="Times New Roman" panose="02020603050405020304" pitchFamily="18" charset="0"/>
+                <a:latin typeface="Century Gothic"/>
+                <a:cs typeface="Times New Roman"/>
               </a:rPr>
               <a:t>персонализированный прогресс пользователя (регистрация, авторизация, сохранение результатов);</a:t>
             </a:r>
@@ -5393,18 +5106,18 @@
           </a:xfrm>
         </p:spPr>
         <p:txBody>
-          <a:bodyPr>
+          <a:bodyPr vert="horz" lIns="91440" tIns="45720" rIns="91440" bIns="45720" rtlCol="0" anchor="t">
             <a:noAutofit/>
           </a:bodyPr>
           <a:lstStyle/>
           <a:p>
             <a:r>
-              <a:rPr lang="ru-RU" sz="6600" dirty="0">
+              <a:rPr lang="ru-RU" sz="5400" dirty="0">
                 <a:solidFill>
                   <a:schemeClr val="accent5"/>
                 </a:solidFill>
-                <a:latin typeface="Times New Roman" panose="02020603050405020304" pitchFamily="18" charset="0"/>
-                <a:cs typeface="Times New Roman" panose="02020603050405020304" pitchFamily="18" charset="0"/>
+                <a:latin typeface="Arial Black"/>
+                <a:cs typeface="Times New Roman"/>
               </a:rPr>
               <a:t>Регистрация и авторизация</a:t>
             </a:r>
@@ -5514,7 +5227,7 @@
           </a:prstGeom>
         </p:spPr>
         <p:txBody>
-          <a:bodyPr vert="horz" lIns="91440" tIns="45720" rIns="91440" bIns="45720" rtlCol="0">
+          <a:bodyPr vert="horz" lIns="91440" tIns="45720" rIns="91440" bIns="45720" rtlCol="0" anchor="t">
             <a:noAutofit/>
           </a:bodyPr>
           <a:lstStyle>
@@ -5684,7 +5397,7 @@
           <a:p>
             <a:r>
               <a:rPr lang="ru-RU" sz="3600" dirty="0">
-                <a:latin typeface="Times New Roman" panose="02020603050405020304" pitchFamily="18" charset="0"/>
+                <a:latin typeface="Century Gothic"/>
                 <a:cs typeface="Times New Roman" panose="02020603050405020304" pitchFamily="18" charset="0"/>
               </a:rPr>
               <a:t>При входе на сайт есть окно с  выбором </a:t>
@@ -5693,13 +5406,13 @@
           <a:p>
             <a:r>
               <a:rPr lang="ru-RU" sz="3600" dirty="0">
-                <a:latin typeface="Times New Roman" panose="02020603050405020304" pitchFamily="18" charset="0"/>
+                <a:latin typeface="Century Gothic"/>
                 <a:cs typeface="Times New Roman" panose="02020603050405020304" pitchFamily="18" charset="0"/>
               </a:rPr>
               <a:t>регистрации или авторизации</a:t>
             </a:r>
-            <a:endParaRPr lang="en-US" sz="3600" dirty="0">
-              <a:latin typeface="Times New Roman" panose="02020603050405020304" pitchFamily="18" charset="0"/>
+            <a:endParaRPr lang="en-US" sz="3600">
+              <a:latin typeface="Century Gothic"/>
               <a:cs typeface="Times New Roman" panose="02020603050405020304" pitchFamily="18" charset="0"/>
             </a:endParaRPr>
           </a:p>
@@ -5811,18 +5524,21 @@
           <a:lstStyle/>
           <a:p>
             <a:r>
-              <a:rPr lang="ru-RU" sz="6600" dirty="0">
+              <a:rPr lang="ru-RU" sz="5400" dirty="0">
                 <a:solidFill>
                   <a:schemeClr val="accent5"/>
                 </a:solidFill>
-                <a:latin typeface="Times New Roman" panose="02020603050405020304" pitchFamily="18" charset="0"/>
-                <a:cs typeface="Times New Roman" panose="02020603050405020304" pitchFamily="18" charset="0"/>
+                <a:latin typeface="Arial Black"/>
+                <a:cs typeface="Times New Roman"/>
               </a:rPr>
               <a:t>Разделы  веб-приложения</a:t>
             </a:r>
-            <a:endParaRPr lang="ru-RU" sz="4800" dirty="0">
-              <a:latin typeface="Times New Roman" panose="02020603050405020304" pitchFamily="18" charset="0"/>
-              <a:cs typeface="Times New Roman" panose="02020603050405020304" pitchFamily="18" charset="0"/>
+            <a:endParaRPr lang="ru-RU" sz="5400">
+              <a:solidFill>
+                <a:schemeClr val="accent5"/>
+              </a:solidFill>
+              <a:latin typeface="Arial Black"/>
+              <a:cs typeface="Times New Roman"/>
             </a:endParaRPr>
           </a:p>
         </p:txBody>
@@ -5907,14 +5623,14 @@
           </a:xfrm>
         </p:spPr>
         <p:txBody>
-          <a:bodyPr>
+          <a:bodyPr vert="horz" lIns="91440" tIns="45720" rIns="91440" bIns="45720" rtlCol="0" anchor="t">
             <a:normAutofit/>
           </a:bodyPr>
           <a:lstStyle/>
           <a:p>
             <a:r>
               <a:rPr lang="ru-RU" sz="4000" dirty="0">
-                <a:latin typeface="Times New Roman" panose="02020603050405020304" pitchFamily="18" charset="0"/>
+                <a:latin typeface="Century Gothic"/>
                 <a:cs typeface="Times New Roman" panose="02020603050405020304" pitchFamily="18" charset="0"/>
               </a:rPr>
               <a:t>сайт включает в себя:</a:t>
@@ -5945,7 +5661,7 @@
           <a:noFill/>
         </p:spPr>
         <p:txBody>
-          <a:bodyPr wrap="square">
+          <a:bodyPr wrap="square" lIns="91440" tIns="45720" rIns="91440" bIns="45720" anchor="t">
             <a:spAutoFit/>
           </a:bodyPr>
           <a:lstStyle/>
@@ -5956,7 +5672,7 @@
             </a:pPr>
             <a:r>
               <a:rPr lang="ru-RU" sz="2800" dirty="0">
-                <a:latin typeface="Times New Roman" panose="02020603050405020304" pitchFamily="18" charset="0"/>
+                <a:latin typeface="Century Gothic"/>
                 <a:cs typeface="Times New Roman" panose="02020603050405020304" pitchFamily="18" charset="0"/>
               </a:rPr>
               <a:t>Основной раздел «Уроки»</a:t>
@@ -5969,7 +5685,7 @@
             </a:pPr>
             <a:r>
               <a:rPr lang="ru-RU" sz="2800" dirty="0">
-                <a:latin typeface="Times New Roman" panose="02020603050405020304" pitchFamily="18" charset="0"/>
+                <a:latin typeface="Century Gothic"/>
                 <a:cs typeface="Times New Roman" panose="02020603050405020304" pitchFamily="18" charset="0"/>
               </a:rPr>
               <a:t>«Слова», «Карточки», «История», «Практика»</a:t>
@@ -5982,7 +5698,7 @@
             </a:pPr>
             <a:r>
               <a:rPr lang="ru-RU" sz="2800" dirty="0">
-                <a:latin typeface="Times New Roman" panose="02020603050405020304" pitchFamily="18" charset="0"/>
+                <a:latin typeface="Century Gothic"/>
                 <a:cs typeface="Times New Roman" panose="02020603050405020304" pitchFamily="18" charset="0"/>
               </a:rPr>
               <a:t>Профиль пользователя</a:t>
@@ -6100,14 +5816,14 @@
                 <a:solidFill>
                   <a:schemeClr val="accent5"/>
                 </a:solidFill>
-                <a:latin typeface="Times New Roman" panose="02020603050405020304" pitchFamily="18" charset="0"/>
+                <a:latin typeface="Arial Black"/>
                 <a:cs typeface="Times New Roman" panose="02020603050405020304" pitchFamily="18" charset="0"/>
               </a:rPr>
               <a:t>Раздел «Уроки»</a:t>
             </a:r>
             <a:br>
               <a:rPr lang="en-US" sz="4400" dirty="0">
-                <a:latin typeface="Times New Roman" panose="02020603050405020304" pitchFamily="18" charset="0"/>
+                <a:latin typeface="Arial Black"/>
                 <a:cs typeface="Times New Roman" panose="02020603050405020304" pitchFamily="18" charset="0"/>
               </a:rPr>
             </a:br>
@@ -6168,14 +5884,14 @@
           </a:xfrm>
         </p:spPr>
         <p:txBody>
-          <a:bodyPr>
+          <a:bodyPr vert="horz" lIns="91440" tIns="45720" rIns="91440" bIns="45720" rtlCol="0" anchor="t">
             <a:noAutofit/>
           </a:bodyPr>
           <a:lstStyle/>
           <a:p>
             <a:r>
               <a:rPr lang="ru-RU" sz="3600" dirty="0">
-                <a:latin typeface="Times New Roman" panose="02020603050405020304" pitchFamily="18" charset="0"/>
+                <a:latin typeface="Century Gothic"/>
                 <a:cs typeface="Times New Roman" panose="02020603050405020304" pitchFamily="18" charset="0"/>
               </a:rPr>
               <a:t>состоит  из основ грамматики и Китайского языка в целом</a:t>
@@ -6383,14 +6099,14 @@
                 <a:solidFill>
                   <a:schemeClr val="accent5"/>
                 </a:solidFill>
-                <a:latin typeface="Times New Roman" panose="02020603050405020304" pitchFamily="18" charset="0"/>
+                <a:latin typeface="Arial Black"/>
                 <a:cs typeface="Times New Roman" panose="02020603050405020304" pitchFamily="18" charset="0"/>
               </a:rPr>
               <a:t>Раздел «Слова»</a:t>
             </a:r>
             <a:br>
               <a:rPr lang="en-US" sz="3200" dirty="0">
-                <a:latin typeface="Times New Roman" panose="02020603050405020304" pitchFamily="18" charset="0"/>
+                <a:latin typeface="Arial Black"/>
                 <a:cs typeface="Times New Roman" panose="02020603050405020304" pitchFamily="18" charset="0"/>
               </a:rPr>
             </a:br>
@@ -6446,36 +6162,50 @@
         </p:nvSpPr>
         <p:spPr>
           <a:xfrm>
-            <a:off x="273153" y="1682732"/>
+            <a:off x="196953" y="1598065"/>
             <a:ext cx="11488058" cy="3830562"/>
           </a:xfrm>
         </p:spPr>
         <p:txBody>
-          <a:bodyPr>
+          <a:bodyPr vert="horz" lIns="91440" tIns="45720" rIns="91440" bIns="45720" rtlCol="0" anchor="t">
             <a:noAutofit/>
           </a:bodyPr>
           <a:lstStyle/>
           <a:p>
             <a:r>
-              <a:rPr lang="ru-RU" sz="3600" dirty="0">
-                <a:latin typeface="Times New Roman" panose="02020603050405020304" pitchFamily="18" charset="0"/>
-                <a:cs typeface="Times New Roman" panose="02020603050405020304" pitchFamily="18" charset="0"/>
+              <a:rPr lang="ru-RU" sz="3200" dirty="0">
+                <a:latin typeface="Century Gothic"/>
+                <a:cs typeface="Times New Roman"/>
               </a:rPr>
-              <a:t>состоит  из слов, которые обязательны для определённого уровня. Модно скачать файл со всеми словами</a:t>
-            </a:r>
-          </a:p>
-          <a:p>
-            <a:endParaRPr lang="ru-RU" sz="3600" dirty="0">
-              <a:latin typeface="Times New Roman" panose="02020603050405020304" pitchFamily="18" charset="0"/>
+              <a:t>состоит  из слов, которые обязательны для </a:t>
+            </a:r>
+            <a:r>
+              <a:rPr lang="ru-RU" sz="3200">
+                <a:latin typeface="Century Gothic"/>
+                <a:cs typeface="Times New Roman"/>
+              </a:rPr>
+              <a:t>определённого уровня. Можно скачать файл со </a:t>
+            </a:r>
+            <a:r>
+              <a:rPr lang="ru-RU" sz="3200" dirty="0">
+                <a:latin typeface="Century Gothic"/>
+                <a:cs typeface="Times New Roman"/>
+              </a:rPr>
+              <a:t>всеми словами</a:t>
+            </a:r>
+          </a:p>
+          <a:p>
+            <a:endParaRPr lang="ru-RU" sz="3200" dirty="0">
+              <a:latin typeface="Century Gothic"/>
               <a:cs typeface="Times New Roman" panose="02020603050405020304" pitchFamily="18" charset="0"/>
             </a:endParaRPr>
           </a:p>
           <a:p>
             <a:pPr algn="l"/>
             <a:r>
-              <a:rPr lang="ru-RU" sz="3600" dirty="0">
-                <a:latin typeface="Times New Roman" panose="02020603050405020304" pitchFamily="18" charset="0"/>
-                <a:cs typeface="Times New Roman" panose="02020603050405020304" pitchFamily="18" charset="0"/>
+              <a:rPr lang="ru-RU" sz="3200" dirty="0">
+                <a:latin typeface="Century Gothic"/>
+                <a:cs typeface="Times New Roman"/>
               </a:rPr>
               <a:t>Каждое слово включает:</a:t>
             </a:r>
@@ -6486,9 +6216,9 @@
               <a:buChar char="•"/>
             </a:pPr>
             <a:r>
-              <a:rPr lang="ru-RU" sz="2800" dirty="0">
-                <a:latin typeface="Times New Roman" panose="02020603050405020304" pitchFamily="18" charset="0"/>
-                <a:cs typeface="Times New Roman" panose="02020603050405020304" pitchFamily="18" charset="0"/>
+              <a:rPr lang="ru-RU" sz="3200" dirty="0">
+                <a:latin typeface="Century Gothic"/>
+                <a:cs typeface="Times New Roman"/>
               </a:rPr>
               <a:t>Написание</a:t>
             </a:r>
@@ -6499,9 +6229,9 @@
               <a:buChar char="•"/>
             </a:pPr>
             <a:r>
-              <a:rPr lang="ru-RU" sz="2800" dirty="0">
-                <a:latin typeface="Times New Roman" panose="02020603050405020304" pitchFamily="18" charset="0"/>
-                <a:cs typeface="Times New Roman" panose="02020603050405020304" pitchFamily="18" charset="0"/>
+              <a:rPr lang="ru-RU" sz="3200" dirty="0">
+                <a:latin typeface="Century Gothic"/>
+                <a:cs typeface="Times New Roman"/>
               </a:rPr>
               <a:t>Транскрипцию</a:t>
             </a:r>
@@ -6512,9 +6242,9 @@
               <a:buChar char="•"/>
             </a:pPr>
             <a:r>
-              <a:rPr lang="ru-RU" sz="2800" dirty="0">
-                <a:latin typeface="Times New Roman" panose="02020603050405020304" pitchFamily="18" charset="0"/>
-                <a:cs typeface="Times New Roman" panose="02020603050405020304" pitchFamily="18" charset="0"/>
+              <a:rPr lang="ru-RU" sz="3200" dirty="0">
+                <a:latin typeface="Century Gothic"/>
+                <a:cs typeface="Times New Roman"/>
               </a:rPr>
               <a:t>Перевод</a:t>
             </a:r>
@@ -6679,19 +6409,19 @@
                 <a:solidFill>
                   <a:schemeClr val="accent5"/>
                 </a:solidFill>
-                <a:latin typeface="Times New Roman" panose="02020603050405020304" pitchFamily="18" charset="0"/>
+                <a:latin typeface="Arial Black"/>
                 <a:cs typeface="Times New Roman" panose="02020603050405020304" pitchFamily="18" charset="0"/>
               </a:rPr>
               <a:t>Раздел «Карточки»</a:t>
             </a:r>
             <a:br>
               <a:rPr lang="en-US" sz="3200" dirty="0">
-                <a:latin typeface="Times New Roman" panose="02020603050405020304" pitchFamily="18" charset="0"/>
+                <a:latin typeface="Arial Black"/>
                 <a:cs typeface="Times New Roman" panose="02020603050405020304" pitchFamily="18" charset="0"/>
               </a:rPr>
             </a:br>
-            <a:endParaRPr lang="ru-RU" sz="3200" dirty="0">
-              <a:latin typeface="Times New Roman" panose="02020603050405020304" pitchFamily="18" charset="0"/>
+            <a:endParaRPr lang="ru-RU" sz="3200">
+              <a:latin typeface="Arial Black"/>
               <a:cs typeface="Times New Roman" panose="02020603050405020304" pitchFamily="18" charset="0"/>
             </a:endParaRPr>
           </a:p>
@@ -6753,14 +6483,14 @@
           </a:xfrm>
         </p:spPr>
         <p:txBody>
-          <a:bodyPr>
+          <a:bodyPr vert="horz" lIns="91440" tIns="45720" rIns="91440" bIns="45720" rtlCol="0" anchor="t">
             <a:noAutofit/>
           </a:bodyPr>
           <a:lstStyle/>
           <a:p>
             <a:r>
               <a:rPr lang="ru-RU" sz="3600" dirty="0">
-                <a:latin typeface="Times New Roman" panose="02020603050405020304" pitchFamily="18" charset="0"/>
+                <a:latin typeface="Century Gothic"/>
                 <a:cs typeface="Times New Roman" panose="02020603050405020304" pitchFamily="18" charset="0"/>
               </a:rPr>
               <a:t>помогает изучить как отдельные слова, так и целые фразы наиболее удобным способом</a:t>
@@ -6768,7 +6498,7 @@
           </a:p>
           <a:p>
             <a:endParaRPr lang="ru-RU" sz="3600" dirty="0">
-              <a:latin typeface="Times New Roman" panose="02020603050405020304" pitchFamily="18" charset="0"/>
+              <a:latin typeface="Century Gothic"/>
               <a:cs typeface="Times New Roman" panose="02020603050405020304" pitchFamily="18" charset="0"/>
             </a:endParaRPr>
           </a:p>
@@ -6932,19 +6662,19 @@
                 <a:solidFill>
                   <a:schemeClr val="accent5"/>
                 </a:solidFill>
-                <a:latin typeface="Times New Roman" panose="02020603050405020304" pitchFamily="18" charset="0"/>
+                <a:latin typeface="Arial Black"/>
                 <a:cs typeface="Times New Roman" panose="02020603050405020304" pitchFamily="18" charset="0"/>
               </a:rPr>
               <a:t>Раздел «История»</a:t>
             </a:r>
             <a:br>
               <a:rPr lang="en-US" sz="4400" dirty="0">
-                <a:latin typeface="Times New Roman" panose="02020603050405020304" pitchFamily="18" charset="0"/>
+                <a:latin typeface="Arial Black"/>
                 <a:cs typeface="Times New Roman" panose="02020603050405020304" pitchFamily="18" charset="0"/>
               </a:rPr>
             </a:br>
-            <a:endParaRPr lang="ru-RU" sz="3200" dirty="0">
-              <a:latin typeface="Times New Roman" panose="02020603050405020304" pitchFamily="18" charset="0"/>
+            <a:endParaRPr lang="ru-RU" sz="3200">
+              <a:latin typeface="Arial Black"/>
               <a:cs typeface="Times New Roman" panose="02020603050405020304" pitchFamily="18" charset="0"/>
             </a:endParaRPr>
           </a:p>
@@ -7006,14 +6736,14 @@
           </a:xfrm>
         </p:spPr>
         <p:txBody>
-          <a:bodyPr>
+          <a:bodyPr vert="horz" lIns="91440" tIns="45720" rIns="91440" bIns="45720" rtlCol="0" anchor="t">
             <a:noAutofit/>
           </a:bodyPr>
           <a:lstStyle/>
           <a:p>
             <a:r>
               <a:rPr lang="ru-RU" sz="3600" dirty="0">
-                <a:latin typeface="Times New Roman" panose="02020603050405020304" pitchFamily="18" charset="0"/>
+                <a:latin typeface="Century Gothic"/>
                 <a:cs typeface="Times New Roman" panose="02020603050405020304" pitchFamily="18" charset="0"/>
               </a:rPr>
               <a:t>состоит из главных моментов истории Китая с возможностью перейти на сайты для изучения</a:t>
@@ -7209,19 +6939,19 @@
                 <a:solidFill>
                   <a:schemeClr val="accent5"/>
                 </a:solidFill>
-                <a:latin typeface="Times New Roman" panose="02020603050405020304" pitchFamily="18" charset="0"/>
+                <a:latin typeface="Arial Black"/>
                 <a:cs typeface="Times New Roman" panose="02020603050405020304" pitchFamily="18" charset="0"/>
               </a:rPr>
               <a:t>Раздел «Практика»</a:t>
             </a:r>
             <a:br>
               <a:rPr lang="en-US" sz="3200" dirty="0">
-                <a:latin typeface="Times New Roman" panose="02020603050405020304" pitchFamily="18" charset="0"/>
+                <a:latin typeface="Arial Black"/>
                 <a:cs typeface="Times New Roman" panose="02020603050405020304" pitchFamily="18" charset="0"/>
               </a:rPr>
             </a:br>
-            <a:endParaRPr lang="ru-RU" sz="3200" dirty="0">
-              <a:latin typeface="Times New Roman" panose="02020603050405020304" pitchFamily="18" charset="0"/>
+            <a:endParaRPr lang="ru-RU" sz="3200">
+              <a:latin typeface="Arial Black"/>
               <a:cs typeface="Times New Roman" panose="02020603050405020304" pitchFamily="18" charset="0"/>
             </a:endParaRPr>
           </a:p>
@@ -7283,14 +7013,14 @@
           </a:xfrm>
         </p:spPr>
         <p:txBody>
-          <a:bodyPr>
+          <a:bodyPr vert="horz" lIns="91440" tIns="45720" rIns="91440" bIns="45720" rtlCol="0" anchor="t">
             <a:noAutofit/>
           </a:bodyPr>
           <a:lstStyle/>
           <a:p>
             <a:r>
               <a:rPr lang="ru-RU" sz="3600" dirty="0">
-                <a:latin typeface="Times New Roman" panose="02020603050405020304" pitchFamily="18" charset="0"/>
+                <a:latin typeface="Century Gothic"/>
                 <a:cs typeface="Times New Roman" panose="02020603050405020304" pitchFamily="18" charset="0"/>
               </a:rPr>
               <a:t>включает практику слов и предложений</a:t>
@@ -7298,7 +7028,7 @@
           </a:p>
           <a:p>
             <a:endParaRPr lang="ru-RU" sz="3600" dirty="0">
-              <a:latin typeface="Times New Roman" panose="02020603050405020304" pitchFamily="18" charset="0"/>
+              <a:latin typeface="Century Gothic"/>
               <a:cs typeface="Times New Roman" panose="02020603050405020304" pitchFamily="18" charset="0"/>
             </a:endParaRPr>
           </a:p>
